--- a/public/videos/repositories/route-delay-stay-alert/route-delay-stay-alert-tech-preview.pptx
+++ b/public/videos/repositories/route-delay-stay-alert/route-delay-stay-alert-tech-preview.pptx
@@ -134,7 +134,7 @@
           <p:cNvPr id="2" name="タイトル 1">
             <a:extLst>
               <a:ext uri="{FF2B5EF4-FFF2-40B4-BE49-F238E27FC236}">
-                <a16:creationId xmlns:a16="http://schemas.microsoft.com/office/drawing/2014/main" id="{DE77CA0E-FE0D-BC8B-212A-2EBB01B76764}"/>
+                <a16:creationId xmlns:a16="http://schemas.microsoft.com/office/drawing/2014/main" id="{16A5EBF6-BA45-0E1D-CDCA-692E3D40AD72}"/>
               </a:ext>
             </a:extLst>
           </p:cNvPr>
@@ -171,7 +171,7 @@
           <p:cNvPr id="3" name="字幕 2">
             <a:extLst>
               <a:ext uri="{FF2B5EF4-FFF2-40B4-BE49-F238E27FC236}">
-                <a16:creationId xmlns:a16="http://schemas.microsoft.com/office/drawing/2014/main" id="{95E17696-B00C-0365-EE9F-B45B4913C3BD}"/>
+                <a16:creationId xmlns:a16="http://schemas.microsoft.com/office/drawing/2014/main" id="{13B26871-56E5-3EA8-B8A2-6C39B7373DFE}"/>
               </a:ext>
             </a:extLst>
           </p:cNvPr>
@@ -241,7 +241,7 @@
           <p:cNvPr id="4" name="日付プレースホルダー 3">
             <a:extLst>
               <a:ext uri="{FF2B5EF4-FFF2-40B4-BE49-F238E27FC236}">
-                <a16:creationId xmlns:a16="http://schemas.microsoft.com/office/drawing/2014/main" id="{14A7A71A-65CF-31A8-BF67-37C8D565844A}"/>
+                <a16:creationId xmlns:a16="http://schemas.microsoft.com/office/drawing/2014/main" id="{4F025095-5C91-8CF4-60D5-B78419731488}"/>
               </a:ext>
             </a:extLst>
           </p:cNvPr>
@@ -257,7 +257,7 @@
           <a:bodyPr/>
           <a:lstStyle/>
           <a:p>
-            <a:fld id="{E2BF01F9-A88D-429E-BBD5-8F25B173AE87}" type="datetimeFigureOut">
+            <a:fld id="{796E391D-2F2B-46D1-BB61-E5B05FCB4C90}" type="datetimeFigureOut">
               <a:rPr kumimoji="1" lang="ja-JP" altLang="en-US" smtClean="0"/>
               <a:t>2026/7/30</a:t>
             </a:fld>
@@ -270,7 +270,7 @@
           <p:cNvPr id="5" name="フッター プレースホルダー 4">
             <a:extLst>
               <a:ext uri="{FF2B5EF4-FFF2-40B4-BE49-F238E27FC236}">
-                <a16:creationId xmlns:a16="http://schemas.microsoft.com/office/drawing/2014/main" id="{6B53837D-22CB-2C85-EA2D-C92B028D6747}"/>
+                <a16:creationId xmlns:a16="http://schemas.microsoft.com/office/drawing/2014/main" id="{7FD12592-69A9-C26F-BCD3-D6CADD724724}"/>
               </a:ext>
             </a:extLst>
           </p:cNvPr>
@@ -295,7 +295,7 @@
           <p:cNvPr id="6" name="スライド番号プレースホルダー 5">
             <a:extLst>
               <a:ext uri="{FF2B5EF4-FFF2-40B4-BE49-F238E27FC236}">
-                <a16:creationId xmlns:a16="http://schemas.microsoft.com/office/drawing/2014/main" id="{D324BB01-9213-31F7-51DE-E28FD36D812F}"/>
+                <a16:creationId xmlns:a16="http://schemas.microsoft.com/office/drawing/2014/main" id="{B962A86D-E995-46CE-EC46-B8ADD413A8B6}"/>
               </a:ext>
             </a:extLst>
           </p:cNvPr>
@@ -311,7 +311,7 @@
           <a:bodyPr/>
           <a:lstStyle/>
           <a:p>
-            <a:fld id="{31E66103-10B5-4441-8EBF-CBE2613960A1}" type="slidenum">
+            <a:fld id="{A939B155-496F-4056-8AE7-3BE543D5FF56}" type="slidenum">
               <a:rPr kumimoji="1" lang="ja-JP" altLang="en-US" smtClean="0"/>
               <a:t>‹#›</a:t>
             </a:fld>
@@ -322,7 +322,7 @@
     </p:spTree>
     <p:extLst>
       <p:ext uri="{BB962C8B-B14F-4D97-AF65-F5344CB8AC3E}">
-        <p14:creationId xmlns:p14="http://schemas.microsoft.com/office/powerpoint/2010/main" val="480636014"/>
+        <p14:creationId xmlns:p14="http://schemas.microsoft.com/office/powerpoint/2010/main" val="2885339771"/>
       </p:ext>
     </p:extLst>
   </p:cSld>
@@ -354,7 +354,7 @@
           <p:cNvPr id="2" name="タイトル 1">
             <a:extLst>
               <a:ext uri="{FF2B5EF4-FFF2-40B4-BE49-F238E27FC236}">
-                <a16:creationId xmlns:a16="http://schemas.microsoft.com/office/drawing/2014/main" id="{030B0A1D-55D1-681B-494C-5C8DE935431C}"/>
+                <a16:creationId xmlns:a16="http://schemas.microsoft.com/office/drawing/2014/main" id="{6F8AC09E-E986-C863-A0A3-99038D7C86BE}"/>
               </a:ext>
             </a:extLst>
           </p:cNvPr>
@@ -382,7 +382,7 @@
           <p:cNvPr id="3" name="縦書きテキスト プレースホルダー 2">
             <a:extLst>
               <a:ext uri="{FF2B5EF4-FFF2-40B4-BE49-F238E27FC236}">
-                <a16:creationId xmlns:a16="http://schemas.microsoft.com/office/drawing/2014/main" id="{B7BD55BF-B2C3-EEDB-9703-1BA249224EBF}"/>
+                <a16:creationId xmlns:a16="http://schemas.microsoft.com/office/drawing/2014/main" id="{5B6F0B83-1F8C-F789-D384-29F7D2CAB387}"/>
               </a:ext>
             </a:extLst>
           </p:cNvPr>
@@ -471,7 +471,7 @@
           <p:cNvPr id="4" name="日付プレースホルダー 3">
             <a:extLst>
               <a:ext uri="{FF2B5EF4-FFF2-40B4-BE49-F238E27FC236}">
-                <a16:creationId xmlns:a16="http://schemas.microsoft.com/office/drawing/2014/main" id="{12FB3455-9E30-D7E0-AD6B-DB95EA9324CD}"/>
+                <a16:creationId xmlns:a16="http://schemas.microsoft.com/office/drawing/2014/main" id="{A985F65E-180E-25B4-AE29-BCA64CF1585D}"/>
               </a:ext>
             </a:extLst>
           </p:cNvPr>
@@ -487,7 +487,7 @@
           <a:bodyPr/>
           <a:lstStyle/>
           <a:p>
-            <a:fld id="{E2BF01F9-A88D-429E-BBD5-8F25B173AE87}" type="datetimeFigureOut">
+            <a:fld id="{796E391D-2F2B-46D1-BB61-E5B05FCB4C90}" type="datetimeFigureOut">
               <a:rPr kumimoji="1" lang="ja-JP" altLang="en-US" smtClean="0"/>
               <a:t>2026/7/30</a:t>
             </a:fld>
@@ -500,7 +500,7 @@
           <p:cNvPr id="5" name="フッター プレースホルダー 4">
             <a:extLst>
               <a:ext uri="{FF2B5EF4-FFF2-40B4-BE49-F238E27FC236}">
-                <a16:creationId xmlns:a16="http://schemas.microsoft.com/office/drawing/2014/main" id="{2E8DDA2A-0E39-328D-BEE7-21C81FA05689}"/>
+                <a16:creationId xmlns:a16="http://schemas.microsoft.com/office/drawing/2014/main" id="{F390FC43-8796-D76F-B8C1-A763162054E9}"/>
               </a:ext>
             </a:extLst>
           </p:cNvPr>
@@ -525,7 +525,7 @@
           <p:cNvPr id="6" name="スライド番号プレースホルダー 5">
             <a:extLst>
               <a:ext uri="{FF2B5EF4-FFF2-40B4-BE49-F238E27FC236}">
-                <a16:creationId xmlns:a16="http://schemas.microsoft.com/office/drawing/2014/main" id="{E402773E-78C0-0839-C3A4-75F4F6E4478A}"/>
+                <a16:creationId xmlns:a16="http://schemas.microsoft.com/office/drawing/2014/main" id="{E48C2E40-EE05-DE48-C49E-F0E4B0F08A1D}"/>
               </a:ext>
             </a:extLst>
           </p:cNvPr>
@@ -541,7 +541,7 @@
           <a:bodyPr/>
           <a:lstStyle/>
           <a:p>
-            <a:fld id="{31E66103-10B5-4441-8EBF-CBE2613960A1}" type="slidenum">
+            <a:fld id="{A939B155-496F-4056-8AE7-3BE543D5FF56}" type="slidenum">
               <a:rPr kumimoji="1" lang="ja-JP" altLang="en-US" smtClean="0"/>
               <a:t>‹#›</a:t>
             </a:fld>
@@ -552,7 +552,7 @@
     </p:spTree>
     <p:extLst>
       <p:ext uri="{BB962C8B-B14F-4D97-AF65-F5344CB8AC3E}">
-        <p14:creationId xmlns:p14="http://schemas.microsoft.com/office/powerpoint/2010/main" val="3351664906"/>
+        <p14:creationId xmlns:p14="http://schemas.microsoft.com/office/powerpoint/2010/main" val="1773792721"/>
       </p:ext>
     </p:extLst>
   </p:cSld>
@@ -584,7 +584,7 @@
           <p:cNvPr id="2" name="縦書きタイトル 1">
             <a:extLst>
               <a:ext uri="{FF2B5EF4-FFF2-40B4-BE49-F238E27FC236}">
-                <a16:creationId xmlns:a16="http://schemas.microsoft.com/office/drawing/2014/main" id="{81EFD5E7-CAB1-3E1B-2EED-6EA1332C3AC5}"/>
+                <a16:creationId xmlns:a16="http://schemas.microsoft.com/office/drawing/2014/main" id="{EC37AA16-7BE1-63B4-86DF-5639A4C0D3F9}"/>
               </a:ext>
             </a:extLst>
           </p:cNvPr>
@@ -617,7 +617,7 @@
           <p:cNvPr id="3" name="縦書きテキスト プレースホルダー 2">
             <a:extLst>
               <a:ext uri="{FF2B5EF4-FFF2-40B4-BE49-F238E27FC236}">
-                <a16:creationId xmlns:a16="http://schemas.microsoft.com/office/drawing/2014/main" id="{EB67992B-E28A-339B-10A9-6D0F866711DE}"/>
+                <a16:creationId xmlns:a16="http://schemas.microsoft.com/office/drawing/2014/main" id="{C66DC4B5-5996-F977-2613-F1F04321D22B}"/>
               </a:ext>
             </a:extLst>
           </p:cNvPr>
@@ -711,7 +711,7 @@
           <p:cNvPr id="4" name="日付プレースホルダー 3">
             <a:extLst>
               <a:ext uri="{FF2B5EF4-FFF2-40B4-BE49-F238E27FC236}">
-                <a16:creationId xmlns:a16="http://schemas.microsoft.com/office/drawing/2014/main" id="{3149B219-4330-A5FA-0909-2198A61AB57A}"/>
+                <a16:creationId xmlns:a16="http://schemas.microsoft.com/office/drawing/2014/main" id="{79A1FE4E-A9C0-B5A6-96A8-1CB19C9CC558}"/>
               </a:ext>
             </a:extLst>
           </p:cNvPr>
@@ -727,7 +727,7 @@
           <a:bodyPr/>
           <a:lstStyle/>
           <a:p>
-            <a:fld id="{E2BF01F9-A88D-429E-BBD5-8F25B173AE87}" type="datetimeFigureOut">
+            <a:fld id="{796E391D-2F2B-46D1-BB61-E5B05FCB4C90}" type="datetimeFigureOut">
               <a:rPr kumimoji="1" lang="ja-JP" altLang="en-US" smtClean="0"/>
               <a:t>2026/7/30</a:t>
             </a:fld>
@@ -740,7 +740,7 @@
           <p:cNvPr id="5" name="フッター プレースホルダー 4">
             <a:extLst>
               <a:ext uri="{FF2B5EF4-FFF2-40B4-BE49-F238E27FC236}">
-                <a16:creationId xmlns:a16="http://schemas.microsoft.com/office/drawing/2014/main" id="{12A821F5-9C35-D468-BF44-FA1C68BA9BDE}"/>
+                <a16:creationId xmlns:a16="http://schemas.microsoft.com/office/drawing/2014/main" id="{F3638FD1-A866-3A5A-9842-1960BB3E6BE2}"/>
               </a:ext>
             </a:extLst>
           </p:cNvPr>
@@ -765,7 +765,7 @@
           <p:cNvPr id="6" name="スライド番号プレースホルダー 5">
             <a:extLst>
               <a:ext uri="{FF2B5EF4-FFF2-40B4-BE49-F238E27FC236}">
-                <a16:creationId xmlns:a16="http://schemas.microsoft.com/office/drawing/2014/main" id="{E53D6FCB-7651-7936-9245-472DBD760083}"/>
+                <a16:creationId xmlns:a16="http://schemas.microsoft.com/office/drawing/2014/main" id="{0DBE3C51-E39D-62B5-53DF-03443455B9B2}"/>
               </a:ext>
             </a:extLst>
           </p:cNvPr>
@@ -781,7 +781,7 @@
           <a:bodyPr/>
           <a:lstStyle/>
           <a:p>
-            <a:fld id="{31E66103-10B5-4441-8EBF-CBE2613960A1}" type="slidenum">
+            <a:fld id="{A939B155-496F-4056-8AE7-3BE543D5FF56}" type="slidenum">
               <a:rPr kumimoji="1" lang="ja-JP" altLang="en-US" smtClean="0"/>
               <a:t>‹#›</a:t>
             </a:fld>
@@ -792,7 +792,7 @@
     </p:spTree>
     <p:extLst>
       <p:ext uri="{BB962C8B-B14F-4D97-AF65-F5344CB8AC3E}">
-        <p14:creationId xmlns:p14="http://schemas.microsoft.com/office/powerpoint/2010/main" val="3357900110"/>
+        <p14:creationId xmlns:p14="http://schemas.microsoft.com/office/powerpoint/2010/main" val="552304749"/>
       </p:ext>
     </p:extLst>
   </p:cSld>
@@ -824,7 +824,7 @@
           <p:cNvPr id="2" name="タイトル 1">
             <a:extLst>
               <a:ext uri="{FF2B5EF4-FFF2-40B4-BE49-F238E27FC236}">
-                <a16:creationId xmlns:a16="http://schemas.microsoft.com/office/drawing/2014/main" id="{07B1E044-6FAC-1A97-59E1-E329D98239F6}"/>
+                <a16:creationId xmlns:a16="http://schemas.microsoft.com/office/drawing/2014/main" id="{DED634AD-6D42-03C7-3EDD-661637D16C5C}"/>
               </a:ext>
             </a:extLst>
           </p:cNvPr>
@@ -852,7 +852,7 @@
           <p:cNvPr id="3" name="コンテンツ プレースホルダー 2">
             <a:extLst>
               <a:ext uri="{FF2B5EF4-FFF2-40B4-BE49-F238E27FC236}">
-                <a16:creationId xmlns:a16="http://schemas.microsoft.com/office/drawing/2014/main" id="{D144DCA4-CD98-2488-50F8-A9FA13B8F2C9}"/>
+                <a16:creationId xmlns:a16="http://schemas.microsoft.com/office/drawing/2014/main" id="{1C8129AC-A940-8384-300B-7DDFAAF74EDC}"/>
               </a:ext>
             </a:extLst>
           </p:cNvPr>
@@ -941,7 +941,7 @@
           <p:cNvPr id="4" name="日付プレースホルダー 3">
             <a:extLst>
               <a:ext uri="{FF2B5EF4-FFF2-40B4-BE49-F238E27FC236}">
-                <a16:creationId xmlns:a16="http://schemas.microsoft.com/office/drawing/2014/main" id="{487A86CF-452D-5E44-56FA-644FD28749D1}"/>
+                <a16:creationId xmlns:a16="http://schemas.microsoft.com/office/drawing/2014/main" id="{388DABBD-0CE0-3FC6-40EE-981074479A98}"/>
               </a:ext>
             </a:extLst>
           </p:cNvPr>
@@ -957,7 +957,7 @@
           <a:bodyPr/>
           <a:lstStyle/>
           <a:p>
-            <a:fld id="{E2BF01F9-A88D-429E-BBD5-8F25B173AE87}" type="datetimeFigureOut">
+            <a:fld id="{796E391D-2F2B-46D1-BB61-E5B05FCB4C90}" type="datetimeFigureOut">
               <a:rPr kumimoji="1" lang="ja-JP" altLang="en-US" smtClean="0"/>
               <a:t>2026/7/30</a:t>
             </a:fld>
@@ -970,7 +970,7 @@
           <p:cNvPr id="5" name="フッター プレースホルダー 4">
             <a:extLst>
               <a:ext uri="{FF2B5EF4-FFF2-40B4-BE49-F238E27FC236}">
-                <a16:creationId xmlns:a16="http://schemas.microsoft.com/office/drawing/2014/main" id="{A6A0D773-2785-8786-4120-8AF1FC474655}"/>
+                <a16:creationId xmlns:a16="http://schemas.microsoft.com/office/drawing/2014/main" id="{27E1A73E-F5FE-1E7B-B850-2D204D6F4811}"/>
               </a:ext>
             </a:extLst>
           </p:cNvPr>
@@ -995,7 +995,7 @@
           <p:cNvPr id="6" name="スライド番号プレースホルダー 5">
             <a:extLst>
               <a:ext uri="{FF2B5EF4-FFF2-40B4-BE49-F238E27FC236}">
-                <a16:creationId xmlns:a16="http://schemas.microsoft.com/office/drawing/2014/main" id="{F598E251-03BE-28BF-A1EC-560B1E0027C2}"/>
+                <a16:creationId xmlns:a16="http://schemas.microsoft.com/office/drawing/2014/main" id="{C5D75822-7697-BD91-9C8D-7C3A27538036}"/>
               </a:ext>
             </a:extLst>
           </p:cNvPr>
@@ -1011,7 +1011,7 @@
           <a:bodyPr/>
           <a:lstStyle/>
           <a:p>
-            <a:fld id="{31E66103-10B5-4441-8EBF-CBE2613960A1}" type="slidenum">
+            <a:fld id="{A939B155-496F-4056-8AE7-3BE543D5FF56}" type="slidenum">
               <a:rPr kumimoji="1" lang="ja-JP" altLang="en-US" smtClean="0"/>
               <a:t>‹#›</a:t>
             </a:fld>
@@ -1022,7 +1022,7 @@
     </p:spTree>
     <p:extLst>
       <p:ext uri="{BB962C8B-B14F-4D97-AF65-F5344CB8AC3E}">
-        <p14:creationId xmlns:p14="http://schemas.microsoft.com/office/powerpoint/2010/main" val="4290666910"/>
+        <p14:creationId xmlns:p14="http://schemas.microsoft.com/office/powerpoint/2010/main" val="2201006045"/>
       </p:ext>
     </p:extLst>
   </p:cSld>
@@ -1054,7 +1054,7 @@
           <p:cNvPr id="2" name="タイトル 1">
             <a:extLst>
               <a:ext uri="{FF2B5EF4-FFF2-40B4-BE49-F238E27FC236}">
-                <a16:creationId xmlns:a16="http://schemas.microsoft.com/office/drawing/2014/main" id="{CF14C219-169F-5316-C078-84A3D7181583}"/>
+                <a16:creationId xmlns:a16="http://schemas.microsoft.com/office/drawing/2014/main" id="{300794C4-5CB0-41C3-D394-791E54CC877D}"/>
               </a:ext>
             </a:extLst>
           </p:cNvPr>
@@ -1091,7 +1091,7 @@
           <p:cNvPr id="3" name="テキスト プレースホルダー 2">
             <a:extLst>
               <a:ext uri="{FF2B5EF4-FFF2-40B4-BE49-F238E27FC236}">
-                <a16:creationId xmlns:a16="http://schemas.microsoft.com/office/drawing/2014/main" id="{6BE7EB6B-A0C0-4460-D6F4-C7097A97DC73}"/>
+                <a16:creationId xmlns:a16="http://schemas.microsoft.com/office/drawing/2014/main" id="{958EAC0B-111D-B82F-9BA8-24DE44EAED8D}"/>
               </a:ext>
             </a:extLst>
           </p:cNvPr>
@@ -1216,7 +1216,7 @@
           <p:cNvPr id="4" name="日付プレースホルダー 3">
             <a:extLst>
               <a:ext uri="{FF2B5EF4-FFF2-40B4-BE49-F238E27FC236}">
-                <a16:creationId xmlns:a16="http://schemas.microsoft.com/office/drawing/2014/main" id="{5C4A8992-1673-56FC-CA98-C27CF8723AAF}"/>
+                <a16:creationId xmlns:a16="http://schemas.microsoft.com/office/drawing/2014/main" id="{53C40CA6-5604-AF58-FC08-F094EB71936A}"/>
               </a:ext>
             </a:extLst>
           </p:cNvPr>
@@ -1232,7 +1232,7 @@
           <a:bodyPr/>
           <a:lstStyle/>
           <a:p>
-            <a:fld id="{E2BF01F9-A88D-429E-BBD5-8F25B173AE87}" type="datetimeFigureOut">
+            <a:fld id="{796E391D-2F2B-46D1-BB61-E5B05FCB4C90}" type="datetimeFigureOut">
               <a:rPr kumimoji="1" lang="ja-JP" altLang="en-US" smtClean="0"/>
               <a:t>2026/7/30</a:t>
             </a:fld>
@@ -1245,7 +1245,7 @@
           <p:cNvPr id="5" name="フッター プレースホルダー 4">
             <a:extLst>
               <a:ext uri="{FF2B5EF4-FFF2-40B4-BE49-F238E27FC236}">
-                <a16:creationId xmlns:a16="http://schemas.microsoft.com/office/drawing/2014/main" id="{18087255-5479-497F-9CFE-A038CC02599A}"/>
+                <a16:creationId xmlns:a16="http://schemas.microsoft.com/office/drawing/2014/main" id="{9F00E566-3BCA-BCEB-A34A-4A358156283B}"/>
               </a:ext>
             </a:extLst>
           </p:cNvPr>
@@ -1270,7 +1270,7 @@
           <p:cNvPr id="6" name="スライド番号プレースホルダー 5">
             <a:extLst>
               <a:ext uri="{FF2B5EF4-FFF2-40B4-BE49-F238E27FC236}">
-                <a16:creationId xmlns:a16="http://schemas.microsoft.com/office/drawing/2014/main" id="{58D99FE7-C15C-94E9-C2F1-09E8B3A46B41}"/>
+                <a16:creationId xmlns:a16="http://schemas.microsoft.com/office/drawing/2014/main" id="{EE84131C-E1F2-A0C4-52A4-EC1BE5CE67DB}"/>
               </a:ext>
             </a:extLst>
           </p:cNvPr>
@@ -1286,7 +1286,7 @@
           <a:bodyPr/>
           <a:lstStyle/>
           <a:p>
-            <a:fld id="{31E66103-10B5-4441-8EBF-CBE2613960A1}" type="slidenum">
+            <a:fld id="{A939B155-496F-4056-8AE7-3BE543D5FF56}" type="slidenum">
               <a:rPr kumimoji="1" lang="ja-JP" altLang="en-US" smtClean="0"/>
               <a:t>‹#›</a:t>
             </a:fld>
@@ -1297,7 +1297,7 @@
     </p:spTree>
     <p:extLst>
       <p:ext uri="{BB962C8B-B14F-4D97-AF65-F5344CB8AC3E}">
-        <p14:creationId xmlns:p14="http://schemas.microsoft.com/office/powerpoint/2010/main" val="2995021743"/>
+        <p14:creationId xmlns:p14="http://schemas.microsoft.com/office/powerpoint/2010/main" val="3790788747"/>
       </p:ext>
     </p:extLst>
   </p:cSld>
@@ -1329,7 +1329,7 @@
           <p:cNvPr id="2" name="タイトル 1">
             <a:extLst>
               <a:ext uri="{FF2B5EF4-FFF2-40B4-BE49-F238E27FC236}">
-                <a16:creationId xmlns:a16="http://schemas.microsoft.com/office/drawing/2014/main" id="{983AE2EF-E7DD-EE48-7703-19F45D271435}"/>
+                <a16:creationId xmlns:a16="http://schemas.microsoft.com/office/drawing/2014/main" id="{33628AF1-83EC-0782-446D-94BF05AFA573}"/>
               </a:ext>
             </a:extLst>
           </p:cNvPr>
@@ -1357,7 +1357,7 @@
           <p:cNvPr id="3" name="コンテンツ プレースホルダー 2">
             <a:extLst>
               <a:ext uri="{FF2B5EF4-FFF2-40B4-BE49-F238E27FC236}">
-                <a16:creationId xmlns:a16="http://schemas.microsoft.com/office/drawing/2014/main" id="{039EE7A6-8A87-06E8-3F11-14EB91788674}"/>
+                <a16:creationId xmlns:a16="http://schemas.microsoft.com/office/drawing/2014/main" id="{3DACBECD-3F56-18BB-D0ED-C6AD98E4D616}"/>
               </a:ext>
             </a:extLst>
           </p:cNvPr>
@@ -1451,7 +1451,7 @@
           <p:cNvPr id="4" name="コンテンツ プレースホルダー 3">
             <a:extLst>
               <a:ext uri="{FF2B5EF4-FFF2-40B4-BE49-F238E27FC236}">
-                <a16:creationId xmlns:a16="http://schemas.microsoft.com/office/drawing/2014/main" id="{B3E5756D-C7A4-7C87-4C57-406F88D052A2}"/>
+                <a16:creationId xmlns:a16="http://schemas.microsoft.com/office/drawing/2014/main" id="{3C3C6B03-A54D-3B26-C71C-3E0AFE783FD9}"/>
               </a:ext>
             </a:extLst>
           </p:cNvPr>
@@ -1545,7 +1545,7 @@
           <p:cNvPr id="5" name="日付プレースホルダー 4">
             <a:extLst>
               <a:ext uri="{FF2B5EF4-FFF2-40B4-BE49-F238E27FC236}">
-                <a16:creationId xmlns:a16="http://schemas.microsoft.com/office/drawing/2014/main" id="{E48FDB79-6726-0CDB-6C85-36C976B9195B}"/>
+                <a16:creationId xmlns:a16="http://schemas.microsoft.com/office/drawing/2014/main" id="{5F0CC97E-90EF-E53A-B4AE-2DC20C2A317D}"/>
               </a:ext>
             </a:extLst>
           </p:cNvPr>
@@ -1561,7 +1561,7 @@
           <a:bodyPr/>
           <a:lstStyle/>
           <a:p>
-            <a:fld id="{E2BF01F9-A88D-429E-BBD5-8F25B173AE87}" type="datetimeFigureOut">
+            <a:fld id="{796E391D-2F2B-46D1-BB61-E5B05FCB4C90}" type="datetimeFigureOut">
               <a:rPr kumimoji="1" lang="ja-JP" altLang="en-US" smtClean="0"/>
               <a:t>2026/7/30</a:t>
             </a:fld>
@@ -1574,7 +1574,7 @@
           <p:cNvPr id="6" name="フッター プレースホルダー 5">
             <a:extLst>
               <a:ext uri="{FF2B5EF4-FFF2-40B4-BE49-F238E27FC236}">
-                <a16:creationId xmlns:a16="http://schemas.microsoft.com/office/drawing/2014/main" id="{0ACB737D-70D2-D58C-AA41-2A74BBCDCDAB}"/>
+                <a16:creationId xmlns:a16="http://schemas.microsoft.com/office/drawing/2014/main" id="{AC117022-675C-93DC-22D2-8B4CA391CA66}"/>
               </a:ext>
             </a:extLst>
           </p:cNvPr>
@@ -1599,7 +1599,7 @@
           <p:cNvPr id="7" name="スライド番号プレースホルダー 6">
             <a:extLst>
               <a:ext uri="{FF2B5EF4-FFF2-40B4-BE49-F238E27FC236}">
-                <a16:creationId xmlns:a16="http://schemas.microsoft.com/office/drawing/2014/main" id="{243A0400-248B-AC62-E85A-E035445FD4BC}"/>
+                <a16:creationId xmlns:a16="http://schemas.microsoft.com/office/drawing/2014/main" id="{90FAB666-EA58-7071-472A-BE27EAC6515F}"/>
               </a:ext>
             </a:extLst>
           </p:cNvPr>
@@ -1615,7 +1615,7 @@
           <a:bodyPr/>
           <a:lstStyle/>
           <a:p>
-            <a:fld id="{31E66103-10B5-4441-8EBF-CBE2613960A1}" type="slidenum">
+            <a:fld id="{A939B155-496F-4056-8AE7-3BE543D5FF56}" type="slidenum">
               <a:rPr kumimoji="1" lang="ja-JP" altLang="en-US" smtClean="0"/>
               <a:t>‹#›</a:t>
             </a:fld>
@@ -1626,7 +1626,7 @@
     </p:spTree>
     <p:extLst>
       <p:ext uri="{BB962C8B-B14F-4D97-AF65-F5344CB8AC3E}">
-        <p14:creationId xmlns:p14="http://schemas.microsoft.com/office/powerpoint/2010/main" val="387160544"/>
+        <p14:creationId xmlns:p14="http://schemas.microsoft.com/office/powerpoint/2010/main" val="1018304438"/>
       </p:ext>
     </p:extLst>
   </p:cSld>
@@ -1658,7 +1658,7 @@
           <p:cNvPr id="2" name="タイトル 1">
             <a:extLst>
               <a:ext uri="{FF2B5EF4-FFF2-40B4-BE49-F238E27FC236}">
-                <a16:creationId xmlns:a16="http://schemas.microsoft.com/office/drawing/2014/main" id="{F66FB5E7-D4C6-DF11-1926-2E1452E3543F}"/>
+                <a16:creationId xmlns:a16="http://schemas.microsoft.com/office/drawing/2014/main" id="{39C1684B-C1BA-A50A-5617-7D0CB4BEB695}"/>
               </a:ext>
             </a:extLst>
           </p:cNvPr>
@@ -1691,7 +1691,7 @@
           <p:cNvPr id="3" name="テキスト プレースホルダー 2">
             <a:extLst>
               <a:ext uri="{FF2B5EF4-FFF2-40B4-BE49-F238E27FC236}">
-                <a16:creationId xmlns:a16="http://schemas.microsoft.com/office/drawing/2014/main" id="{FA81D2E4-4FD0-8D41-DAFF-3BA231E36158}"/>
+                <a16:creationId xmlns:a16="http://schemas.microsoft.com/office/drawing/2014/main" id="{435D6793-6DE0-3818-3EB9-15936C86D9D7}"/>
               </a:ext>
             </a:extLst>
           </p:cNvPr>
@@ -1762,7 +1762,7 @@
           <p:cNvPr id="4" name="コンテンツ プレースホルダー 3">
             <a:extLst>
               <a:ext uri="{FF2B5EF4-FFF2-40B4-BE49-F238E27FC236}">
-                <a16:creationId xmlns:a16="http://schemas.microsoft.com/office/drawing/2014/main" id="{86BC33E5-E421-89EC-1335-254C1B523AB7}"/>
+                <a16:creationId xmlns:a16="http://schemas.microsoft.com/office/drawing/2014/main" id="{D1DB2CC0-BE7D-C94A-2638-83B6FEDEFFF3}"/>
               </a:ext>
             </a:extLst>
           </p:cNvPr>
@@ -1856,7 +1856,7 @@
           <p:cNvPr id="5" name="テキスト プレースホルダー 4">
             <a:extLst>
               <a:ext uri="{FF2B5EF4-FFF2-40B4-BE49-F238E27FC236}">
-                <a16:creationId xmlns:a16="http://schemas.microsoft.com/office/drawing/2014/main" id="{8675815A-A7EA-18C9-6CEA-4A6E5D7CBF4D}"/>
+                <a16:creationId xmlns:a16="http://schemas.microsoft.com/office/drawing/2014/main" id="{16CCCF1F-8BFE-F3D0-E473-8551D38395BE}"/>
               </a:ext>
             </a:extLst>
           </p:cNvPr>
@@ -1927,7 +1927,7 @@
           <p:cNvPr id="6" name="コンテンツ プレースホルダー 5">
             <a:extLst>
               <a:ext uri="{FF2B5EF4-FFF2-40B4-BE49-F238E27FC236}">
-                <a16:creationId xmlns:a16="http://schemas.microsoft.com/office/drawing/2014/main" id="{5FDEF3D6-288E-C143-F8DF-F8900178BAF1}"/>
+                <a16:creationId xmlns:a16="http://schemas.microsoft.com/office/drawing/2014/main" id="{9EC92892-0C1A-BAD6-0287-8E5CBECF7FF6}"/>
               </a:ext>
             </a:extLst>
           </p:cNvPr>
@@ -2021,7 +2021,7 @@
           <p:cNvPr id="7" name="日付プレースホルダー 6">
             <a:extLst>
               <a:ext uri="{FF2B5EF4-FFF2-40B4-BE49-F238E27FC236}">
-                <a16:creationId xmlns:a16="http://schemas.microsoft.com/office/drawing/2014/main" id="{3F5F75D1-879C-AC81-284C-B44242F97263}"/>
+                <a16:creationId xmlns:a16="http://schemas.microsoft.com/office/drawing/2014/main" id="{24755756-47A1-5118-C275-07BC56F00D14}"/>
               </a:ext>
             </a:extLst>
           </p:cNvPr>
@@ -2037,7 +2037,7 @@
           <a:bodyPr/>
           <a:lstStyle/>
           <a:p>
-            <a:fld id="{E2BF01F9-A88D-429E-BBD5-8F25B173AE87}" type="datetimeFigureOut">
+            <a:fld id="{796E391D-2F2B-46D1-BB61-E5B05FCB4C90}" type="datetimeFigureOut">
               <a:rPr kumimoji="1" lang="ja-JP" altLang="en-US" smtClean="0"/>
               <a:t>2026/7/30</a:t>
             </a:fld>
@@ -2050,7 +2050,7 @@
           <p:cNvPr id="8" name="フッター プレースホルダー 7">
             <a:extLst>
               <a:ext uri="{FF2B5EF4-FFF2-40B4-BE49-F238E27FC236}">
-                <a16:creationId xmlns:a16="http://schemas.microsoft.com/office/drawing/2014/main" id="{C067C8D2-88BC-EAEC-B8FA-1C4AA0A8BA12}"/>
+                <a16:creationId xmlns:a16="http://schemas.microsoft.com/office/drawing/2014/main" id="{C74F240A-E8E0-B35C-16EA-DF9D9C8FDB70}"/>
               </a:ext>
             </a:extLst>
           </p:cNvPr>
@@ -2075,7 +2075,7 @@
           <p:cNvPr id="9" name="スライド番号プレースホルダー 8">
             <a:extLst>
               <a:ext uri="{FF2B5EF4-FFF2-40B4-BE49-F238E27FC236}">
-                <a16:creationId xmlns:a16="http://schemas.microsoft.com/office/drawing/2014/main" id="{2E818A95-5200-CF68-C2B6-10FF121F8FD2}"/>
+                <a16:creationId xmlns:a16="http://schemas.microsoft.com/office/drawing/2014/main" id="{DE92A115-62B7-4B36-2AA3-DBE62B6E85D9}"/>
               </a:ext>
             </a:extLst>
           </p:cNvPr>
@@ -2091,7 +2091,7 @@
           <a:bodyPr/>
           <a:lstStyle/>
           <a:p>
-            <a:fld id="{31E66103-10B5-4441-8EBF-CBE2613960A1}" type="slidenum">
+            <a:fld id="{A939B155-496F-4056-8AE7-3BE543D5FF56}" type="slidenum">
               <a:rPr kumimoji="1" lang="ja-JP" altLang="en-US" smtClean="0"/>
               <a:t>‹#›</a:t>
             </a:fld>
@@ -2102,7 +2102,7 @@
     </p:spTree>
     <p:extLst>
       <p:ext uri="{BB962C8B-B14F-4D97-AF65-F5344CB8AC3E}">
-        <p14:creationId xmlns:p14="http://schemas.microsoft.com/office/powerpoint/2010/main" val="909807790"/>
+        <p14:creationId xmlns:p14="http://schemas.microsoft.com/office/powerpoint/2010/main" val="1591026863"/>
       </p:ext>
     </p:extLst>
   </p:cSld>
@@ -2134,7 +2134,7 @@
           <p:cNvPr id="2" name="タイトル 1">
             <a:extLst>
               <a:ext uri="{FF2B5EF4-FFF2-40B4-BE49-F238E27FC236}">
-                <a16:creationId xmlns:a16="http://schemas.microsoft.com/office/drawing/2014/main" id="{3231DB0F-AFFA-DCF6-61D3-1E02F43AFC82}"/>
+                <a16:creationId xmlns:a16="http://schemas.microsoft.com/office/drawing/2014/main" id="{EB018B11-4D76-3D15-DFDB-8C10A1D0C9FC}"/>
               </a:ext>
             </a:extLst>
           </p:cNvPr>
@@ -2162,7 +2162,7 @@
           <p:cNvPr id="3" name="日付プレースホルダー 2">
             <a:extLst>
               <a:ext uri="{FF2B5EF4-FFF2-40B4-BE49-F238E27FC236}">
-                <a16:creationId xmlns:a16="http://schemas.microsoft.com/office/drawing/2014/main" id="{2ECC041B-9E62-1BB7-08BE-B28A91E47A6F}"/>
+                <a16:creationId xmlns:a16="http://schemas.microsoft.com/office/drawing/2014/main" id="{B04CAD0D-4D9A-C80B-9AF1-89711E5CDBF6}"/>
               </a:ext>
             </a:extLst>
           </p:cNvPr>
@@ -2178,7 +2178,7 @@
           <a:bodyPr/>
           <a:lstStyle/>
           <a:p>
-            <a:fld id="{E2BF01F9-A88D-429E-BBD5-8F25B173AE87}" type="datetimeFigureOut">
+            <a:fld id="{796E391D-2F2B-46D1-BB61-E5B05FCB4C90}" type="datetimeFigureOut">
               <a:rPr kumimoji="1" lang="ja-JP" altLang="en-US" smtClean="0"/>
               <a:t>2026/7/30</a:t>
             </a:fld>
@@ -2191,7 +2191,7 @@
           <p:cNvPr id="4" name="フッター プレースホルダー 3">
             <a:extLst>
               <a:ext uri="{FF2B5EF4-FFF2-40B4-BE49-F238E27FC236}">
-                <a16:creationId xmlns:a16="http://schemas.microsoft.com/office/drawing/2014/main" id="{1C506118-2042-1B1B-18E3-3F33395419D0}"/>
+                <a16:creationId xmlns:a16="http://schemas.microsoft.com/office/drawing/2014/main" id="{0090A6E4-A24B-EAC4-5E85-72A53CCFC5F6}"/>
               </a:ext>
             </a:extLst>
           </p:cNvPr>
@@ -2216,7 +2216,7 @@
           <p:cNvPr id="5" name="スライド番号プレースホルダー 4">
             <a:extLst>
               <a:ext uri="{FF2B5EF4-FFF2-40B4-BE49-F238E27FC236}">
-                <a16:creationId xmlns:a16="http://schemas.microsoft.com/office/drawing/2014/main" id="{57324388-9957-EB0C-C9DB-4DB6150DFDF6}"/>
+                <a16:creationId xmlns:a16="http://schemas.microsoft.com/office/drawing/2014/main" id="{867937DC-9B62-7D70-AEE4-CC273F92F0A9}"/>
               </a:ext>
             </a:extLst>
           </p:cNvPr>
@@ -2232,7 +2232,7 @@
           <a:bodyPr/>
           <a:lstStyle/>
           <a:p>
-            <a:fld id="{31E66103-10B5-4441-8EBF-CBE2613960A1}" type="slidenum">
+            <a:fld id="{A939B155-496F-4056-8AE7-3BE543D5FF56}" type="slidenum">
               <a:rPr kumimoji="1" lang="ja-JP" altLang="en-US" smtClean="0"/>
               <a:t>‹#›</a:t>
             </a:fld>
@@ -2243,7 +2243,7 @@
     </p:spTree>
     <p:extLst>
       <p:ext uri="{BB962C8B-B14F-4D97-AF65-F5344CB8AC3E}">
-        <p14:creationId xmlns:p14="http://schemas.microsoft.com/office/powerpoint/2010/main" val="3322758092"/>
+        <p14:creationId xmlns:p14="http://schemas.microsoft.com/office/powerpoint/2010/main" val="3794174569"/>
       </p:ext>
     </p:extLst>
   </p:cSld>
@@ -2275,7 +2275,7 @@
           <p:cNvPr id="2" name="日付プレースホルダー 1">
             <a:extLst>
               <a:ext uri="{FF2B5EF4-FFF2-40B4-BE49-F238E27FC236}">
-                <a16:creationId xmlns:a16="http://schemas.microsoft.com/office/drawing/2014/main" id="{6A082F1C-C068-C31E-C5DB-2CFA536C2454}"/>
+                <a16:creationId xmlns:a16="http://schemas.microsoft.com/office/drawing/2014/main" id="{EA275A2B-D19F-EA5C-93BD-85379B287839}"/>
               </a:ext>
             </a:extLst>
           </p:cNvPr>
@@ -2291,7 +2291,7 @@
           <a:bodyPr/>
           <a:lstStyle/>
           <a:p>
-            <a:fld id="{E2BF01F9-A88D-429E-BBD5-8F25B173AE87}" type="datetimeFigureOut">
+            <a:fld id="{796E391D-2F2B-46D1-BB61-E5B05FCB4C90}" type="datetimeFigureOut">
               <a:rPr kumimoji="1" lang="ja-JP" altLang="en-US" smtClean="0"/>
               <a:t>2026/7/30</a:t>
             </a:fld>
@@ -2304,7 +2304,7 @@
           <p:cNvPr id="3" name="フッター プレースホルダー 2">
             <a:extLst>
               <a:ext uri="{FF2B5EF4-FFF2-40B4-BE49-F238E27FC236}">
-                <a16:creationId xmlns:a16="http://schemas.microsoft.com/office/drawing/2014/main" id="{8F57AA90-F67F-5065-F595-2287FA003708}"/>
+                <a16:creationId xmlns:a16="http://schemas.microsoft.com/office/drawing/2014/main" id="{241C0D75-8736-D038-B3D7-BA31F75642EA}"/>
               </a:ext>
             </a:extLst>
           </p:cNvPr>
@@ -2329,7 +2329,7 @@
           <p:cNvPr id="4" name="スライド番号プレースホルダー 3">
             <a:extLst>
               <a:ext uri="{FF2B5EF4-FFF2-40B4-BE49-F238E27FC236}">
-                <a16:creationId xmlns:a16="http://schemas.microsoft.com/office/drawing/2014/main" id="{6B018C68-3DA2-20F9-BA8F-B413AD36E80F}"/>
+                <a16:creationId xmlns:a16="http://schemas.microsoft.com/office/drawing/2014/main" id="{874F83EA-2D1C-CB16-DCB5-767E993D6E51}"/>
               </a:ext>
             </a:extLst>
           </p:cNvPr>
@@ -2345,7 +2345,7 @@
           <a:bodyPr/>
           <a:lstStyle/>
           <a:p>
-            <a:fld id="{31E66103-10B5-4441-8EBF-CBE2613960A1}" type="slidenum">
+            <a:fld id="{A939B155-496F-4056-8AE7-3BE543D5FF56}" type="slidenum">
               <a:rPr kumimoji="1" lang="ja-JP" altLang="en-US" smtClean="0"/>
               <a:t>‹#›</a:t>
             </a:fld>
@@ -2356,7 +2356,7 @@
     </p:spTree>
     <p:extLst>
       <p:ext uri="{BB962C8B-B14F-4D97-AF65-F5344CB8AC3E}">
-        <p14:creationId xmlns:p14="http://schemas.microsoft.com/office/powerpoint/2010/main" val="3282105947"/>
+        <p14:creationId xmlns:p14="http://schemas.microsoft.com/office/powerpoint/2010/main" val="46014678"/>
       </p:ext>
     </p:extLst>
   </p:cSld>
@@ -2388,7 +2388,7 @@
           <p:cNvPr id="2" name="タイトル 1">
             <a:extLst>
               <a:ext uri="{FF2B5EF4-FFF2-40B4-BE49-F238E27FC236}">
-                <a16:creationId xmlns:a16="http://schemas.microsoft.com/office/drawing/2014/main" id="{8C1B59A6-062C-F0AA-4CEE-2A98CE3694EF}"/>
+                <a16:creationId xmlns:a16="http://schemas.microsoft.com/office/drawing/2014/main" id="{AA6FF3C5-7DFF-1640-AA68-B7A1477035E2}"/>
               </a:ext>
             </a:extLst>
           </p:cNvPr>
@@ -2425,7 +2425,7 @@
           <p:cNvPr id="3" name="コンテンツ プレースホルダー 2">
             <a:extLst>
               <a:ext uri="{FF2B5EF4-FFF2-40B4-BE49-F238E27FC236}">
-                <a16:creationId xmlns:a16="http://schemas.microsoft.com/office/drawing/2014/main" id="{2B0897AB-51BC-C719-200B-761CB6B9A950}"/>
+                <a16:creationId xmlns:a16="http://schemas.microsoft.com/office/drawing/2014/main" id="{26A35BB4-9351-ED2B-34D9-7932F599D162}"/>
               </a:ext>
             </a:extLst>
           </p:cNvPr>
@@ -2547,7 +2547,7 @@
           <p:cNvPr id="4" name="テキスト プレースホルダー 3">
             <a:extLst>
               <a:ext uri="{FF2B5EF4-FFF2-40B4-BE49-F238E27FC236}">
-                <a16:creationId xmlns:a16="http://schemas.microsoft.com/office/drawing/2014/main" id="{3B5C102C-D608-C1AB-972A-0D2CD25440EE}"/>
+                <a16:creationId xmlns:a16="http://schemas.microsoft.com/office/drawing/2014/main" id="{E029577C-33B3-CF35-FAB0-AF28A88BEFDC}"/>
               </a:ext>
             </a:extLst>
           </p:cNvPr>
@@ -2618,7 +2618,7 @@
           <p:cNvPr id="5" name="日付プレースホルダー 4">
             <a:extLst>
               <a:ext uri="{FF2B5EF4-FFF2-40B4-BE49-F238E27FC236}">
-                <a16:creationId xmlns:a16="http://schemas.microsoft.com/office/drawing/2014/main" id="{B45C9178-D413-DD96-D836-9E63D9D7B710}"/>
+                <a16:creationId xmlns:a16="http://schemas.microsoft.com/office/drawing/2014/main" id="{DFCB001C-B19B-FCA2-36E7-55040DB97F0B}"/>
               </a:ext>
             </a:extLst>
           </p:cNvPr>
@@ -2634,7 +2634,7 @@
           <a:bodyPr/>
           <a:lstStyle/>
           <a:p>
-            <a:fld id="{E2BF01F9-A88D-429E-BBD5-8F25B173AE87}" type="datetimeFigureOut">
+            <a:fld id="{796E391D-2F2B-46D1-BB61-E5B05FCB4C90}" type="datetimeFigureOut">
               <a:rPr kumimoji="1" lang="ja-JP" altLang="en-US" smtClean="0"/>
               <a:t>2026/7/30</a:t>
             </a:fld>
@@ -2647,7 +2647,7 @@
           <p:cNvPr id="6" name="フッター プレースホルダー 5">
             <a:extLst>
               <a:ext uri="{FF2B5EF4-FFF2-40B4-BE49-F238E27FC236}">
-                <a16:creationId xmlns:a16="http://schemas.microsoft.com/office/drawing/2014/main" id="{10606E04-B501-5F1F-66ED-B7959728BCAB}"/>
+                <a16:creationId xmlns:a16="http://schemas.microsoft.com/office/drawing/2014/main" id="{F5622745-4075-1F73-DD1B-E95D919C796D}"/>
               </a:ext>
             </a:extLst>
           </p:cNvPr>
@@ -2672,7 +2672,7 @@
           <p:cNvPr id="7" name="スライド番号プレースホルダー 6">
             <a:extLst>
               <a:ext uri="{FF2B5EF4-FFF2-40B4-BE49-F238E27FC236}">
-                <a16:creationId xmlns:a16="http://schemas.microsoft.com/office/drawing/2014/main" id="{1E19EF1F-1DDA-B86B-F852-C3B42A4C29FF}"/>
+                <a16:creationId xmlns:a16="http://schemas.microsoft.com/office/drawing/2014/main" id="{DD51B6A2-C048-1C61-8895-1AC99C14C081}"/>
               </a:ext>
             </a:extLst>
           </p:cNvPr>
@@ -2688,7 +2688,7 @@
           <a:bodyPr/>
           <a:lstStyle/>
           <a:p>
-            <a:fld id="{31E66103-10B5-4441-8EBF-CBE2613960A1}" type="slidenum">
+            <a:fld id="{A939B155-496F-4056-8AE7-3BE543D5FF56}" type="slidenum">
               <a:rPr kumimoji="1" lang="ja-JP" altLang="en-US" smtClean="0"/>
               <a:t>‹#›</a:t>
             </a:fld>
@@ -2699,7 +2699,7 @@
     </p:spTree>
     <p:extLst>
       <p:ext uri="{BB962C8B-B14F-4D97-AF65-F5344CB8AC3E}">
-        <p14:creationId xmlns:p14="http://schemas.microsoft.com/office/powerpoint/2010/main" val="3752260427"/>
+        <p14:creationId xmlns:p14="http://schemas.microsoft.com/office/powerpoint/2010/main" val="1663744870"/>
       </p:ext>
     </p:extLst>
   </p:cSld>
@@ -2731,7 +2731,7 @@
           <p:cNvPr id="2" name="タイトル 1">
             <a:extLst>
               <a:ext uri="{FF2B5EF4-FFF2-40B4-BE49-F238E27FC236}">
-                <a16:creationId xmlns:a16="http://schemas.microsoft.com/office/drawing/2014/main" id="{63FB959F-926D-E41A-C766-D00105020FE0}"/>
+                <a16:creationId xmlns:a16="http://schemas.microsoft.com/office/drawing/2014/main" id="{9C3A0416-5C6A-9962-93DD-05781D5EC99B}"/>
               </a:ext>
             </a:extLst>
           </p:cNvPr>
@@ -2768,7 +2768,7 @@
           <p:cNvPr id="3" name="図プレースホルダー 2">
             <a:extLst>
               <a:ext uri="{FF2B5EF4-FFF2-40B4-BE49-F238E27FC236}">
-                <a16:creationId xmlns:a16="http://schemas.microsoft.com/office/drawing/2014/main" id="{7817DB00-5873-7F13-7090-4F0299FB05DA}"/>
+                <a16:creationId xmlns:a16="http://schemas.microsoft.com/office/drawing/2014/main" id="{1B08F33C-B198-CAD5-5FEE-589D8543C6A4}"/>
               </a:ext>
             </a:extLst>
           </p:cNvPr>
@@ -2835,7 +2835,7 @@
           <p:cNvPr id="4" name="テキスト プレースホルダー 3">
             <a:extLst>
               <a:ext uri="{FF2B5EF4-FFF2-40B4-BE49-F238E27FC236}">
-                <a16:creationId xmlns:a16="http://schemas.microsoft.com/office/drawing/2014/main" id="{6DAB0A72-2D83-AB00-8320-083B51121A15}"/>
+                <a16:creationId xmlns:a16="http://schemas.microsoft.com/office/drawing/2014/main" id="{43545D94-1D16-8B64-5280-173CA2F37FB9}"/>
               </a:ext>
             </a:extLst>
           </p:cNvPr>
@@ -2906,7 +2906,7 @@
           <p:cNvPr id="5" name="日付プレースホルダー 4">
             <a:extLst>
               <a:ext uri="{FF2B5EF4-FFF2-40B4-BE49-F238E27FC236}">
-                <a16:creationId xmlns:a16="http://schemas.microsoft.com/office/drawing/2014/main" id="{CE9C0676-ED3E-424B-0F87-38F1ACA38917}"/>
+                <a16:creationId xmlns:a16="http://schemas.microsoft.com/office/drawing/2014/main" id="{0FF123B4-CC6A-1C3C-06E1-B5AD54C7331B}"/>
               </a:ext>
             </a:extLst>
           </p:cNvPr>
@@ -2922,7 +2922,7 @@
           <a:bodyPr/>
           <a:lstStyle/>
           <a:p>
-            <a:fld id="{E2BF01F9-A88D-429E-BBD5-8F25B173AE87}" type="datetimeFigureOut">
+            <a:fld id="{796E391D-2F2B-46D1-BB61-E5B05FCB4C90}" type="datetimeFigureOut">
               <a:rPr kumimoji="1" lang="ja-JP" altLang="en-US" smtClean="0"/>
               <a:t>2026/7/30</a:t>
             </a:fld>
@@ -2935,7 +2935,7 @@
           <p:cNvPr id="6" name="フッター プレースホルダー 5">
             <a:extLst>
               <a:ext uri="{FF2B5EF4-FFF2-40B4-BE49-F238E27FC236}">
-                <a16:creationId xmlns:a16="http://schemas.microsoft.com/office/drawing/2014/main" id="{468009AB-9BE7-B964-CBA4-C5A971EC592A}"/>
+                <a16:creationId xmlns:a16="http://schemas.microsoft.com/office/drawing/2014/main" id="{B05B628C-89A7-6B6B-AD60-862A1C420F73}"/>
               </a:ext>
             </a:extLst>
           </p:cNvPr>
@@ -2960,7 +2960,7 @@
           <p:cNvPr id="7" name="スライド番号プレースホルダー 6">
             <a:extLst>
               <a:ext uri="{FF2B5EF4-FFF2-40B4-BE49-F238E27FC236}">
-                <a16:creationId xmlns:a16="http://schemas.microsoft.com/office/drawing/2014/main" id="{E6C46655-6EE6-7D3B-035B-B36FF3F7676F}"/>
+                <a16:creationId xmlns:a16="http://schemas.microsoft.com/office/drawing/2014/main" id="{31FB4384-DA7D-504D-0DC6-253F6E817975}"/>
               </a:ext>
             </a:extLst>
           </p:cNvPr>
@@ -2976,7 +2976,7 @@
           <a:bodyPr/>
           <a:lstStyle/>
           <a:p>
-            <a:fld id="{31E66103-10B5-4441-8EBF-CBE2613960A1}" type="slidenum">
+            <a:fld id="{A939B155-496F-4056-8AE7-3BE543D5FF56}" type="slidenum">
               <a:rPr kumimoji="1" lang="ja-JP" altLang="en-US" smtClean="0"/>
               <a:t>‹#›</a:t>
             </a:fld>
@@ -2987,7 +2987,7 @@
     </p:spTree>
     <p:extLst>
       <p:ext uri="{BB962C8B-B14F-4D97-AF65-F5344CB8AC3E}">
-        <p14:creationId xmlns:p14="http://schemas.microsoft.com/office/powerpoint/2010/main" val="2798818680"/>
+        <p14:creationId xmlns:p14="http://schemas.microsoft.com/office/powerpoint/2010/main" val="2427900662"/>
       </p:ext>
     </p:extLst>
   </p:cSld>
@@ -3024,7 +3024,7 @@
           <p:cNvPr id="2" name="タイトル プレースホルダー 1">
             <a:extLst>
               <a:ext uri="{FF2B5EF4-FFF2-40B4-BE49-F238E27FC236}">
-                <a16:creationId xmlns:a16="http://schemas.microsoft.com/office/drawing/2014/main" id="{24C4D766-C169-A828-6596-F27618F168A7}"/>
+                <a16:creationId xmlns:a16="http://schemas.microsoft.com/office/drawing/2014/main" id="{DBAA0383-B3CE-740E-E8A2-81285674EEBA}"/>
               </a:ext>
             </a:extLst>
           </p:cNvPr>
@@ -3062,7 +3062,7 @@
           <p:cNvPr id="3" name="テキスト プレースホルダー 2">
             <a:extLst>
               <a:ext uri="{FF2B5EF4-FFF2-40B4-BE49-F238E27FC236}">
-                <a16:creationId xmlns:a16="http://schemas.microsoft.com/office/drawing/2014/main" id="{BE73216F-86B2-157B-EF45-71FB983DF13A}"/>
+                <a16:creationId xmlns:a16="http://schemas.microsoft.com/office/drawing/2014/main" id="{E80B0AAF-5C14-3383-5331-2DE61632B934}"/>
               </a:ext>
             </a:extLst>
           </p:cNvPr>
@@ -3161,7 +3161,7 @@
           <p:cNvPr id="4" name="日付プレースホルダー 3">
             <a:extLst>
               <a:ext uri="{FF2B5EF4-FFF2-40B4-BE49-F238E27FC236}">
-                <a16:creationId xmlns:a16="http://schemas.microsoft.com/office/drawing/2014/main" id="{142547A0-7F57-7820-9D8E-33E7616EEADA}"/>
+                <a16:creationId xmlns:a16="http://schemas.microsoft.com/office/drawing/2014/main" id="{10C8A2F2-6D1D-AEC2-0609-2D9E0BADA078}"/>
               </a:ext>
             </a:extLst>
           </p:cNvPr>
@@ -3195,7 +3195,7 @@
             </a:lvl1pPr>
           </a:lstStyle>
           <a:p>
-            <a:fld id="{E2BF01F9-A88D-429E-BBD5-8F25B173AE87}" type="datetimeFigureOut">
+            <a:fld id="{796E391D-2F2B-46D1-BB61-E5B05FCB4C90}" type="datetimeFigureOut">
               <a:rPr kumimoji="1" lang="ja-JP" altLang="en-US" smtClean="0"/>
               <a:t>2026/7/30</a:t>
             </a:fld>
@@ -3208,7 +3208,7 @@
           <p:cNvPr id="5" name="フッター プレースホルダー 4">
             <a:extLst>
               <a:ext uri="{FF2B5EF4-FFF2-40B4-BE49-F238E27FC236}">
-                <a16:creationId xmlns:a16="http://schemas.microsoft.com/office/drawing/2014/main" id="{C2DBB9D2-7F75-2D03-9314-75ABB2E34E57}"/>
+                <a16:creationId xmlns:a16="http://schemas.microsoft.com/office/drawing/2014/main" id="{E6FEB5C8-E4F6-5D2E-7231-86E3F063B6BB}"/>
               </a:ext>
             </a:extLst>
           </p:cNvPr>
@@ -3251,7 +3251,7 @@
           <p:cNvPr id="6" name="スライド番号プレースホルダー 5">
             <a:extLst>
               <a:ext uri="{FF2B5EF4-FFF2-40B4-BE49-F238E27FC236}">
-                <a16:creationId xmlns:a16="http://schemas.microsoft.com/office/drawing/2014/main" id="{A486F9B7-76E1-0670-BCBB-ABDAA02A236C}"/>
+                <a16:creationId xmlns:a16="http://schemas.microsoft.com/office/drawing/2014/main" id="{72B1CFB7-A17F-5D84-4135-FDBAF9BE1078}"/>
               </a:ext>
             </a:extLst>
           </p:cNvPr>
@@ -3285,7 +3285,7 @@
             </a:lvl1pPr>
           </a:lstStyle>
           <a:p>
-            <a:fld id="{31E66103-10B5-4441-8EBF-CBE2613960A1}" type="slidenum">
+            <a:fld id="{A939B155-496F-4056-8AE7-3BE543D5FF56}" type="slidenum">
               <a:rPr kumimoji="1" lang="ja-JP" altLang="en-US" smtClean="0"/>
               <a:t>‹#›</a:t>
             </a:fld>
@@ -3296,7 +3296,7 @@
     </p:spTree>
     <p:extLst>
       <p:ext uri="{BB962C8B-B14F-4D97-AF65-F5344CB8AC3E}">
-        <p14:creationId xmlns:p14="http://schemas.microsoft.com/office/powerpoint/2010/main" val="4097253820"/>
+        <p14:creationId xmlns:p14="http://schemas.microsoft.com/office/powerpoint/2010/main" val="668601145"/>
       </p:ext>
     </p:extLst>
   </p:cSld>
@@ -3619,7 +3619,7 @@
           <p:cNvPr id="2" name="テキスト ボックス 1">
             <a:extLst>
               <a:ext uri="{FF2B5EF4-FFF2-40B4-BE49-F238E27FC236}">
-                <a16:creationId xmlns:a16="http://schemas.microsoft.com/office/drawing/2014/main" id="{D14BA80C-7C11-5F62-51CE-98463B7F36BE}"/>
+                <a16:creationId xmlns:a16="http://schemas.microsoft.com/office/drawing/2014/main" id="{2898BF90-52BD-0FB1-95D5-34A9ADFB374C}"/>
               </a:ext>
             </a:extLst>
           </p:cNvPr>
@@ -3665,7 +3665,7 @@
           <p:cNvPr id="3" name="テキスト ボックス 2">
             <a:extLst>
               <a:ext uri="{FF2B5EF4-FFF2-40B4-BE49-F238E27FC236}">
-                <a16:creationId xmlns:a16="http://schemas.microsoft.com/office/drawing/2014/main" id="{C96BEDC8-3C16-1326-45CB-2F9BAA013E84}"/>
+                <a16:creationId xmlns:a16="http://schemas.microsoft.com/office/drawing/2014/main" id="{16EA473D-FF42-983E-D623-9AF758B9BD22}"/>
               </a:ext>
             </a:extLst>
           </p:cNvPr>
@@ -3714,7 +3714,7 @@
           <p:cNvPr id="4" name="テキスト ボックス 3">
             <a:extLst>
               <a:ext uri="{FF2B5EF4-FFF2-40B4-BE49-F238E27FC236}">
-                <a16:creationId xmlns:a16="http://schemas.microsoft.com/office/drawing/2014/main" id="{B1EDE5EE-C629-2EDC-DDA6-9D910FE6EB54}"/>
+                <a16:creationId xmlns:a16="http://schemas.microsoft.com/office/drawing/2014/main" id="{703B77AE-B66B-859B-F888-6CF69CF9969D}"/>
               </a:ext>
             </a:extLst>
           </p:cNvPr>
@@ -3754,7 +3754,7 @@
           <p:cNvPr id="5" name="テキスト ボックス 4">
             <a:extLst>
               <a:ext uri="{FF2B5EF4-FFF2-40B4-BE49-F238E27FC236}">
-                <a16:creationId xmlns:a16="http://schemas.microsoft.com/office/drawing/2014/main" id="{37CF82CA-1AD8-DE01-3D1F-9E8A1AC68D2D}"/>
+                <a16:creationId xmlns:a16="http://schemas.microsoft.com/office/drawing/2014/main" id="{7DB6DEAE-B995-52F0-C890-92C616337BE2}"/>
               </a:ext>
             </a:extLst>
           </p:cNvPr>
@@ -3801,7 +3801,7 @@
             <a:hlinkClick r:id="" action="ppaction://media"/>
             <a:extLst>
               <a:ext uri="{FF2B5EF4-FFF2-40B4-BE49-F238E27FC236}">
-                <a16:creationId xmlns:a16="http://schemas.microsoft.com/office/drawing/2014/main" id="{710B954F-91DE-450B-8347-24C7CC979B2E}"/>
+                <a16:creationId xmlns:a16="http://schemas.microsoft.com/office/drawing/2014/main" id="{28E438BF-AB56-DF33-B7B3-765E53035C17}"/>
               </a:ext>
             </a:extLst>
           </p:cNvPr>
@@ -3836,7 +3836,7 @@
     </p:spTree>
     <p:extLst>
       <p:ext uri="{BB962C8B-B14F-4D97-AF65-F5344CB8AC3E}">
-        <p14:creationId xmlns:p14="http://schemas.microsoft.com/office/powerpoint/2010/main" val="2736471577"/>
+        <p14:creationId xmlns:p14="http://schemas.microsoft.com/office/powerpoint/2010/main" val="3317587914"/>
       </p:ext>
     </p:extLst>
   </p:cSld>
@@ -3960,7 +3960,7 @@
           <p:cNvPr id="2" name="テキスト ボックス 1">
             <a:extLst>
               <a:ext uri="{FF2B5EF4-FFF2-40B4-BE49-F238E27FC236}">
-                <a16:creationId xmlns:a16="http://schemas.microsoft.com/office/drawing/2014/main" id="{22D9B227-0671-8CF8-7C83-05B4220AF48A}"/>
+                <a16:creationId xmlns:a16="http://schemas.microsoft.com/office/drawing/2014/main" id="{F0F6F888-FA2B-01EC-688C-3E695EE3E356}"/>
               </a:ext>
             </a:extLst>
           </p:cNvPr>
@@ -4006,7 +4006,7 @@
           <p:cNvPr id="3" name="テキスト ボックス 2">
             <a:extLst>
               <a:ext uri="{FF2B5EF4-FFF2-40B4-BE49-F238E27FC236}">
-                <a16:creationId xmlns:a16="http://schemas.microsoft.com/office/drawing/2014/main" id="{6CD1B2FA-859C-78AD-233A-648DE11192B6}"/>
+                <a16:creationId xmlns:a16="http://schemas.microsoft.com/office/drawing/2014/main" id="{41169F60-9985-EB58-84B4-746649560A4E}"/>
               </a:ext>
             </a:extLst>
           </p:cNvPr>
@@ -4046,7 +4046,7 @@
           <p:cNvPr id="4" name="テキスト ボックス 3">
             <a:extLst>
               <a:ext uri="{FF2B5EF4-FFF2-40B4-BE49-F238E27FC236}">
-                <a16:creationId xmlns:a16="http://schemas.microsoft.com/office/drawing/2014/main" id="{F1BC9A66-D823-B6F1-95FA-78B26FDD3CF0}"/>
+                <a16:creationId xmlns:a16="http://schemas.microsoft.com/office/drawing/2014/main" id="{323D1381-6D80-D346-FAD5-B99A79C9A205}"/>
               </a:ext>
             </a:extLst>
           </p:cNvPr>
@@ -4110,7 +4110,7 @@
           <p:cNvPr id="5" name="テキスト ボックス 4">
             <a:extLst>
               <a:ext uri="{FF2B5EF4-FFF2-40B4-BE49-F238E27FC236}">
-                <a16:creationId xmlns:a16="http://schemas.microsoft.com/office/drawing/2014/main" id="{2C3EC6A0-2E03-C174-C9FF-C392469785B9}"/>
+                <a16:creationId xmlns:a16="http://schemas.microsoft.com/office/drawing/2014/main" id="{4E9E7731-9B2C-DD0D-DA3B-4B096FB784FC}"/>
               </a:ext>
             </a:extLst>
           </p:cNvPr>
@@ -4157,7 +4157,7 @@
             <a:hlinkClick r:id="" action="ppaction://media"/>
             <a:extLst>
               <a:ext uri="{FF2B5EF4-FFF2-40B4-BE49-F238E27FC236}">
-                <a16:creationId xmlns:a16="http://schemas.microsoft.com/office/drawing/2014/main" id="{F52E192F-9AE0-E742-B7B2-4509EB969E25}"/>
+                <a16:creationId xmlns:a16="http://schemas.microsoft.com/office/drawing/2014/main" id="{6B57B48E-7403-67BE-CAE3-26340BCAC187}"/>
               </a:ext>
             </a:extLst>
           </p:cNvPr>
@@ -4192,7 +4192,7 @@
     </p:spTree>
     <p:extLst>
       <p:ext uri="{BB962C8B-B14F-4D97-AF65-F5344CB8AC3E}">
-        <p14:creationId xmlns:p14="http://schemas.microsoft.com/office/powerpoint/2010/main" val="330537987"/>
+        <p14:creationId xmlns:p14="http://schemas.microsoft.com/office/powerpoint/2010/main" val="561000620"/>
       </p:ext>
     </p:extLst>
   </p:cSld>
@@ -4316,7 +4316,7 @@
           <p:cNvPr id="2" name="テキスト ボックス 1">
             <a:extLst>
               <a:ext uri="{FF2B5EF4-FFF2-40B4-BE49-F238E27FC236}">
-                <a16:creationId xmlns:a16="http://schemas.microsoft.com/office/drawing/2014/main" id="{60306D45-567D-3900-4F36-BD8136AC6271}"/>
+                <a16:creationId xmlns:a16="http://schemas.microsoft.com/office/drawing/2014/main" id="{6FF779CE-12EC-FB18-BAEC-6F487C14E5C5}"/>
               </a:ext>
             </a:extLst>
           </p:cNvPr>
@@ -4362,7 +4362,7 @@
           <p:cNvPr id="3" name="テキスト ボックス 2">
             <a:extLst>
               <a:ext uri="{FF2B5EF4-FFF2-40B4-BE49-F238E27FC236}">
-                <a16:creationId xmlns:a16="http://schemas.microsoft.com/office/drawing/2014/main" id="{0413CF71-F345-709D-C389-B0DCBA780F5A}"/>
+                <a16:creationId xmlns:a16="http://schemas.microsoft.com/office/drawing/2014/main" id="{7EF99C14-2301-2D42-1C0B-D4942CCB15ED}"/>
               </a:ext>
             </a:extLst>
           </p:cNvPr>
@@ -4402,7 +4402,7 @@
           <p:cNvPr id="4" name="テキスト ボックス 3">
             <a:extLst>
               <a:ext uri="{FF2B5EF4-FFF2-40B4-BE49-F238E27FC236}">
-                <a16:creationId xmlns:a16="http://schemas.microsoft.com/office/drawing/2014/main" id="{ED1BA7A6-5810-6E18-A314-D68DB5629EC3}"/>
+                <a16:creationId xmlns:a16="http://schemas.microsoft.com/office/drawing/2014/main" id="{F6EFA39F-A82D-9DA2-0C4E-B5BCD89E5E7A}"/>
               </a:ext>
             </a:extLst>
           </p:cNvPr>
@@ -4497,7 +4497,7 @@
           <p:cNvPr id="5" name="テキスト ボックス 4">
             <a:extLst>
               <a:ext uri="{FF2B5EF4-FFF2-40B4-BE49-F238E27FC236}">
-                <a16:creationId xmlns:a16="http://schemas.microsoft.com/office/drawing/2014/main" id="{043F2C61-D6AF-8A72-8834-3D60C4804F2D}"/>
+                <a16:creationId xmlns:a16="http://schemas.microsoft.com/office/drawing/2014/main" id="{4E1554C0-3F32-0EA3-5C6B-D7C3C9A786CC}"/>
               </a:ext>
             </a:extLst>
           </p:cNvPr>
@@ -4544,7 +4544,7 @@
             <a:hlinkClick r:id="" action="ppaction://media"/>
             <a:extLst>
               <a:ext uri="{FF2B5EF4-FFF2-40B4-BE49-F238E27FC236}">
-                <a16:creationId xmlns:a16="http://schemas.microsoft.com/office/drawing/2014/main" id="{206EC5C5-B645-1E54-7A23-E98ADD2A306C}"/>
+                <a16:creationId xmlns:a16="http://schemas.microsoft.com/office/drawing/2014/main" id="{16640632-44B5-E20E-3D5E-665AB3C42427}"/>
               </a:ext>
             </a:extLst>
           </p:cNvPr>
@@ -4579,7 +4579,7 @@
     </p:spTree>
     <p:extLst>
       <p:ext uri="{BB962C8B-B14F-4D97-AF65-F5344CB8AC3E}">
-        <p14:creationId xmlns:p14="http://schemas.microsoft.com/office/powerpoint/2010/main" val="2845297457"/>
+        <p14:creationId xmlns:p14="http://schemas.microsoft.com/office/powerpoint/2010/main" val="4082282941"/>
       </p:ext>
     </p:extLst>
   </p:cSld>
@@ -4703,7 +4703,7 @@
           <p:cNvPr id="2" name="テキスト ボックス 1">
             <a:extLst>
               <a:ext uri="{FF2B5EF4-FFF2-40B4-BE49-F238E27FC236}">
-                <a16:creationId xmlns:a16="http://schemas.microsoft.com/office/drawing/2014/main" id="{F55D290A-2085-AD29-4477-6CF18B2BD61F}"/>
+                <a16:creationId xmlns:a16="http://schemas.microsoft.com/office/drawing/2014/main" id="{9961EDFC-93A2-3CA9-C79D-1A3B2E83FF56}"/>
               </a:ext>
             </a:extLst>
           </p:cNvPr>
@@ -4749,7 +4749,7 @@
           <p:cNvPr id="3" name="テキスト ボックス 2">
             <a:extLst>
               <a:ext uri="{FF2B5EF4-FFF2-40B4-BE49-F238E27FC236}">
-                <a16:creationId xmlns:a16="http://schemas.microsoft.com/office/drawing/2014/main" id="{1673ADBC-BD70-E15F-85EB-C5D7A7CA69F3}"/>
+                <a16:creationId xmlns:a16="http://schemas.microsoft.com/office/drawing/2014/main" id="{4678A266-19F3-2DE3-49EF-732DB23C122B}"/>
               </a:ext>
             </a:extLst>
           </p:cNvPr>
@@ -4789,7 +4789,7 @@
           <p:cNvPr id="4" name="テキスト ボックス 3">
             <a:extLst>
               <a:ext uri="{FF2B5EF4-FFF2-40B4-BE49-F238E27FC236}">
-                <a16:creationId xmlns:a16="http://schemas.microsoft.com/office/drawing/2014/main" id="{9BDD037D-FA48-0F52-675D-038C363A8E39}"/>
+                <a16:creationId xmlns:a16="http://schemas.microsoft.com/office/drawing/2014/main" id="{D30684A7-77D4-8CB2-0888-DC77E77EEC28}"/>
               </a:ext>
             </a:extLst>
           </p:cNvPr>
@@ -4899,7 +4899,7 @@
           <p:cNvPr id="5" name="テキスト ボックス 4">
             <a:extLst>
               <a:ext uri="{FF2B5EF4-FFF2-40B4-BE49-F238E27FC236}">
-                <a16:creationId xmlns:a16="http://schemas.microsoft.com/office/drawing/2014/main" id="{5D57554A-A138-0016-23CB-4A7D287C854E}"/>
+                <a16:creationId xmlns:a16="http://schemas.microsoft.com/office/drawing/2014/main" id="{B1D9EE0B-516C-5655-7C9E-5BA8AC6A1904}"/>
               </a:ext>
             </a:extLst>
           </p:cNvPr>
@@ -4946,7 +4946,7 @@
             <a:hlinkClick r:id="" action="ppaction://media"/>
             <a:extLst>
               <a:ext uri="{FF2B5EF4-FFF2-40B4-BE49-F238E27FC236}">
-                <a16:creationId xmlns:a16="http://schemas.microsoft.com/office/drawing/2014/main" id="{CE7FF8AA-7E67-5F60-9FC5-D714FE64D6C2}"/>
+                <a16:creationId xmlns:a16="http://schemas.microsoft.com/office/drawing/2014/main" id="{8F54C0B2-34C3-DD35-A5A0-CD36467EAD59}"/>
               </a:ext>
             </a:extLst>
           </p:cNvPr>
@@ -4981,7 +4981,7 @@
     </p:spTree>
     <p:extLst>
       <p:ext uri="{BB962C8B-B14F-4D97-AF65-F5344CB8AC3E}">
-        <p14:creationId xmlns:p14="http://schemas.microsoft.com/office/powerpoint/2010/main" val="1476480084"/>
+        <p14:creationId xmlns:p14="http://schemas.microsoft.com/office/powerpoint/2010/main" val="1644951496"/>
       </p:ext>
     </p:extLst>
   </p:cSld>
@@ -5105,7 +5105,7 @@
           <p:cNvPr id="2" name="テキスト ボックス 1">
             <a:extLst>
               <a:ext uri="{FF2B5EF4-FFF2-40B4-BE49-F238E27FC236}">
-                <a16:creationId xmlns:a16="http://schemas.microsoft.com/office/drawing/2014/main" id="{7232C12F-CCA1-86CC-2ADD-CBA0B1337C85}"/>
+                <a16:creationId xmlns:a16="http://schemas.microsoft.com/office/drawing/2014/main" id="{C17CC334-FACE-535F-80EB-CFD4641B125D}"/>
               </a:ext>
             </a:extLst>
           </p:cNvPr>
@@ -5151,7 +5151,7 @@
           <p:cNvPr id="3" name="テキスト ボックス 2">
             <a:extLst>
               <a:ext uri="{FF2B5EF4-FFF2-40B4-BE49-F238E27FC236}">
-                <a16:creationId xmlns:a16="http://schemas.microsoft.com/office/drawing/2014/main" id="{91757764-1942-796C-C407-8743CA9B0A6B}"/>
+                <a16:creationId xmlns:a16="http://schemas.microsoft.com/office/drawing/2014/main" id="{BF13D328-3E5D-8E5F-ABD3-45AF88D4669A}"/>
               </a:ext>
             </a:extLst>
           </p:cNvPr>
@@ -5191,7 +5191,7 @@
           <p:cNvPr id="4" name="テキスト ボックス 3">
             <a:extLst>
               <a:ext uri="{FF2B5EF4-FFF2-40B4-BE49-F238E27FC236}">
-                <a16:creationId xmlns:a16="http://schemas.microsoft.com/office/drawing/2014/main" id="{C6B7D601-EDF6-6F52-74FD-9D57EDEFA687}"/>
+                <a16:creationId xmlns:a16="http://schemas.microsoft.com/office/drawing/2014/main" id="{F8B4CB3A-78A6-A422-2684-BCEC7831D7C7}"/>
               </a:ext>
             </a:extLst>
           </p:cNvPr>
@@ -5215,20 +5215,14 @@
           <a:lstStyle/>
           <a:p>
             <a:r>
-              <a:rPr kumimoji="1" lang="en-US" altLang="ja-JP" sz="2000">
+              <a:rPr kumimoji="1" lang="ja-JP" altLang="en-US" sz="2000">
                 <a:solidFill>
                   <a:srgbClr val="333333"/>
                 </a:solidFill>
                 <a:latin typeface="Arial" panose="020B0604020202020204" pitchFamily="34" charset="0"/>
               </a:rPr>
-              <a:t>Set confirmed custom domain</a:t>
-            </a:r>
-            <a:endParaRPr kumimoji="1" lang="ja-JP" altLang="en-US" sz="2000">
-              <a:solidFill>
-                <a:srgbClr val="333333"/>
-              </a:solidFill>
-              <a:latin typeface="Arial" panose="020B0604020202020204" pitchFamily="34" charset="0"/>
-            </a:endParaRPr>
+              <a:t>直近のコミットでは、実装の見直しと継続的な改善が行われました。</a:t>
+            </a:r>
           </a:p>
         </p:txBody>
       </p:sp>
@@ -5237,7 +5231,7 @@
           <p:cNvPr id="5" name="テキスト ボックス 4">
             <a:extLst>
               <a:ext uri="{FF2B5EF4-FFF2-40B4-BE49-F238E27FC236}">
-                <a16:creationId xmlns:a16="http://schemas.microsoft.com/office/drawing/2014/main" id="{E59E9585-C39A-17B8-746E-5E17690D87A8}"/>
+                <a16:creationId xmlns:a16="http://schemas.microsoft.com/office/drawing/2014/main" id="{AC2E9E7E-273F-0FA0-B8A4-5ABFC9A3DEBC}"/>
               </a:ext>
             </a:extLst>
           </p:cNvPr>
@@ -5284,7 +5278,7 @@
             <a:hlinkClick r:id="" action="ppaction://media"/>
             <a:extLst>
               <a:ext uri="{FF2B5EF4-FFF2-40B4-BE49-F238E27FC236}">
-                <a16:creationId xmlns:a16="http://schemas.microsoft.com/office/drawing/2014/main" id="{AF6F0D5C-6298-40E5-B878-10517345727E}"/>
+                <a16:creationId xmlns:a16="http://schemas.microsoft.com/office/drawing/2014/main" id="{B1B2AC72-14A2-685F-2152-814C56BC099A}"/>
               </a:ext>
             </a:extLst>
           </p:cNvPr>
@@ -5319,7 +5313,7 @@
     </p:spTree>
     <p:extLst>
       <p:ext uri="{BB962C8B-B14F-4D97-AF65-F5344CB8AC3E}">
-        <p14:creationId xmlns:p14="http://schemas.microsoft.com/office/powerpoint/2010/main" val="1401251019"/>
+        <p14:creationId xmlns:p14="http://schemas.microsoft.com/office/powerpoint/2010/main" val="4136570505"/>
       </p:ext>
     </p:extLst>
   </p:cSld>
@@ -5362,7 +5356,7 @@
                                   <p:childTnLst>
                                     <p:cmd type="call" cmd="playFrom(0.0)">
                                       <p:cBhvr>
-                                        <p:cTn id="6" dur="6451" fill="hold"/>
+                                        <p:cTn id="6" dur="6076" fill="hold"/>
                                         <p:tgtEl>
                                           <p:spTgt spid="6"/>
                                         </p:tgtEl>
@@ -5443,7 +5437,7 @@
           <p:cNvPr id="2" name="テキスト ボックス 1">
             <a:extLst>
               <a:ext uri="{FF2B5EF4-FFF2-40B4-BE49-F238E27FC236}">
-                <a16:creationId xmlns:a16="http://schemas.microsoft.com/office/drawing/2014/main" id="{FD330A28-7246-0CE6-B671-468F8A4CBA7A}"/>
+                <a16:creationId xmlns:a16="http://schemas.microsoft.com/office/drawing/2014/main" id="{C36C05C1-8DF1-1A16-E88B-9C4464F74D6F}"/>
               </a:ext>
             </a:extLst>
           </p:cNvPr>
@@ -5489,7 +5483,7 @@
           <p:cNvPr id="3" name="テキスト ボックス 2">
             <a:extLst>
               <a:ext uri="{FF2B5EF4-FFF2-40B4-BE49-F238E27FC236}">
-                <a16:creationId xmlns:a16="http://schemas.microsoft.com/office/drawing/2014/main" id="{381CAAF9-80C3-C941-7D6C-ADE4938DE456}"/>
+                <a16:creationId xmlns:a16="http://schemas.microsoft.com/office/drawing/2014/main" id="{7A055F85-4B4A-C471-AD26-7FD273451302}"/>
               </a:ext>
             </a:extLst>
           </p:cNvPr>
@@ -5529,7 +5523,7 @@
           <p:cNvPr id="4" name="テキスト ボックス 3">
             <a:extLst>
               <a:ext uri="{FF2B5EF4-FFF2-40B4-BE49-F238E27FC236}">
-                <a16:creationId xmlns:a16="http://schemas.microsoft.com/office/drawing/2014/main" id="{25772395-3A39-C7C9-42E9-5598985BAA25}"/>
+                <a16:creationId xmlns:a16="http://schemas.microsoft.com/office/drawing/2014/main" id="{DD4D47AF-0BD0-CFE2-FBEC-DB9CF6A5476B}"/>
               </a:ext>
             </a:extLst>
           </p:cNvPr>
@@ -5594,7 +5588,7 @@
           <p:cNvPr id="5" name="テキスト ボックス 4">
             <a:extLst>
               <a:ext uri="{FF2B5EF4-FFF2-40B4-BE49-F238E27FC236}">
-                <a16:creationId xmlns:a16="http://schemas.microsoft.com/office/drawing/2014/main" id="{DC29CA7A-96B1-CCB0-3360-4E3B1BC9E246}"/>
+                <a16:creationId xmlns:a16="http://schemas.microsoft.com/office/drawing/2014/main" id="{A0BB8102-4301-BD85-BC36-58200AD076A4}"/>
               </a:ext>
             </a:extLst>
           </p:cNvPr>
@@ -5641,7 +5635,7 @@
             <a:hlinkClick r:id="" action="ppaction://media"/>
             <a:extLst>
               <a:ext uri="{FF2B5EF4-FFF2-40B4-BE49-F238E27FC236}">
-                <a16:creationId xmlns:a16="http://schemas.microsoft.com/office/drawing/2014/main" id="{041B2DFA-B8B2-91DC-A542-63A58C4F24E6}"/>
+                <a16:creationId xmlns:a16="http://schemas.microsoft.com/office/drawing/2014/main" id="{E5284A94-ADE4-7C8D-A31F-87933358EFDE}"/>
               </a:ext>
             </a:extLst>
           </p:cNvPr>
@@ -5676,7 +5670,7 @@
     </p:spTree>
     <p:extLst>
       <p:ext uri="{BB962C8B-B14F-4D97-AF65-F5344CB8AC3E}">
-        <p14:creationId xmlns:p14="http://schemas.microsoft.com/office/powerpoint/2010/main" val="1341541736"/>
+        <p14:creationId xmlns:p14="http://schemas.microsoft.com/office/powerpoint/2010/main" val="3309146823"/>
       </p:ext>
     </p:extLst>
   </p:cSld>
